--- a/decks/hist-hastings/hist-hastings_ch4_two-armies.pptx
+++ b/decks/hist-hastings/hist-hastings_ch4_two-armies.pptx
@@ -126,29 +126,29 @@
   <p:extLst>
     <p:ext uri="{521415D9-36F7-43E2-AB2F-B90AF26B5E84}">
       <p14:sectionLst xmlns:p14="http://schemas.microsoft.com/office/powerpoint/2010/main">
-        <p14:section name="Opening" id="{2a56c7f5-c1b7-d4af-2b1f-8506bc5a4d29}">
+        <p14:section name="Opening" id="{ac7e4172-6f97-3c80-b421-9e2efa923980}">
           <p14:sldIdLst>
             <p14:sldId id="256"/>
           </p14:sldIdLst>
         </p14:section>
-        <p14:section name="Gate" id="{6f9b741d-9b3d-0349-c74c-7cb91439aed9}">
+        <p14:section name="Gate" id="{173d12c9-e3bc-c2dc-e452-e5dd5a97485b}">
           <p14:sldIdLst>
             <p14:sldId id="257"/>
             <p14:sldId id="258"/>
           </p14:sldIdLst>
         </p14:section>
-        <p14:section name="Pre-teach" id="{74b517a5-8fe4-4b82-aabe-f820658b7aad}">
+        <p14:section name="Pre-teach" id="{dafb92b6-9b9c-9ea9-2af6-794278f367db}">
           <p14:sldIdLst>
             <p14:sldId id="259"/>
           </p14:sldIdLst>
         </p14:section>
-        <p14:section name="Read-along" id="{938b8b6a-e1e6-a93c-ea51-4def2467aeed}">
+        <p14:section name="Read-along" id="{bb97d282-5787-d6b1-a006-43b2fb321a35}">
           <p14:sldIdLst>
             <p14:sldId id="260"/>
             <p14:sldId id="261"/>
           </p14:sldIdLst>
         </p14:section>
-        <p14:section name="Teach" id="{c247229b-2c89-561d-b73a-ff935d5327f4}">
+        <p14:section name="Teach" id="{ec54cc2a-9eba-fc5a-1f8f-bf88adaa3576}">
           <p14:sldIdLst>
             <p14:sldId id="262"/>
             <p14:sldId id="263"/>
@@ -156,7 +156,7 @@
             <p14:sldId id="265"/>
           </p14:sldIdLst>
         </p14:section>
-        <p14:section name="Routes" id="{d843a2a3-3608-5fe4-5314-abb619aaa904}">
+        <p14:section name="Routes" id="{5b7c33d6-2c2e-2d79-3c36-fb5978c34615}">
           <p14:sldIdLst>
             <p14:sldId id="266"/>
             <p14:sldId id="267"/>
@@ -166,12 +166,12 @@
             <p14:sldId id="271"/>
           </p14:sldIdLst>
         </p14:section>
-        <p14:section name="Close" id="{02fc990c-30b5-e4b3-f8ab-e355482bbdbd}">
+        <p14:section name="Close" id="{3ff1bf65-a381-2bf9-750f-78cdb62abfef}">
           <p14:sldIdLst>
             <p14:sldId id="272"/>
           </p14:sldIdLst>
         </p14:section>
-        <p14:section name="Answers" id="{9fc37fcc-9c77-830c-7084-a5ddae480221}">
+        <p14:section name="Answers" id="{2bfd8282-8dcc-7006-fc25-529d16191ed5}">
           <p14:sldIdLst>
             <p14:sldId id="273"/>
             <p14:sldId id="274"/>
@@ -1513,7 +1513,7 @@
             <a:r>
               <a:rPr lang="en-US" dirty="0"/>
               <a:t>Answers — task 2: Tired army, rested army. Reveal the answer; pupils mark their own work in a different colour, then read the "why" together. Same destination for every lane, so one answer serves the whole class.
-Answer: A   His men could rest and build a camp while Harold's men had to march the length of England and arrive tired
+Answer: B   His men could rest and build a camp while Harold's men had to march the length of England and arrive tired
 Why: By waiting in his base camp, William let his army rest and prepare, while Harold's army, already weakened by Stamford Bridge, had to march the length of England and arrived exhausted with about 7,000 men.
 Ask a Support pupil to explain one step, and a Stretch pupil to share their extension.</a:t>
             </a:r>
@@ -8132,7 +8132,7 @@
                 <a:ea typeface="Calibri" pitchFamily="34" charset="-122"/>
                 <a:cs typeface="Calibri" pitchFamily="34" charset="-120"/>
               </a:rPr>
-              <a:t>His men could rest and build a camp while Harold's men had to march the length of England and arrive tired</a:t>
+              <a:t>It let William's ships sail back to Normandy for more men</a:t>
             </a:r>
             <a:endParaRPr lang="en-US" sz="2600" dirty="0"/>
           </a:p>
@@ -8169,7 +8169,7 @@
                 <a:ea typeface="Calibri" pitchFamily="34" charset="-122"/>
                 <a:cs typeface="Calibri" pitchFamily="34" charset="-120"/>
               </a:rPr>
-              <a:t>It gave Hardrada time to join William</a:t>
+              <a:t>His men could rest and build a camp while Harold's men had to march the length of England and arrive tired</a:t>
             </a:r>
             <a:endParaRPr lang="en-US" sz="2600" dirty="0"/>
           </a:p>
@@ -8206,7 +8206,7 @@
                 <a:ea typeface="Calibri" pitchFamily="34" charset="-122"/>
                 <a:cs typeface="Calibri" pitchFamily="34" charset="-120"/>
               </a:rPr>
-              <a:t>It let William's ships sail back to Normandy for more men</a:t>
+              <a:t>It gave Hardrada time to join William</a:t>
             </a:r>
             <a:endParaRPr lang="en-US" sz="2600" dirty="0"/>
           </a:p>
@@ -9647,7 +9647,7 @@
                 <a:ea typeface="Calibri" pitchFamily="34" charset="-122"/>
                 <a:cs typeface="Calibri" pitchFamily="34" charset="-120"/>
               </a:rPr>
-              <a:t>Harold had surrendered</a:t>
+              <a:t>The English nobles supported William</a:t>
             </a:r>
             <a:endParaRPr lang="en-US" sz="2400" dirty="0"/>
           </a:p>
@@ -9684,7 +9684,7 @@
                 <a:ea typeface="Calibri" pitchFamily="34" charset="-122"/>
                 <a:cs typeface="Calibri" pitchFamily="34" charset="-120"/>
               </a:rPr>
-              <a:t>The English nobles supported William</a:t>
+              <a:t>The south coast had no beaches to defend</a:t>
             </a:r>
             <a:endParaRPr lang="en-US" sz="2400" dirty="0"/>
           </a:p>
@@ -9721,7 +9721,7 @@
                 <a:ea typeface="Calibri" pitchFamily="34" charset="-122"/>
                 <a:cs typeface="Calibri" pitchFamily="34" charset="-120"/>
               </a:rPr>
-              <a:t>The south coast had no beaches to defend</a:t>
+              <a:t>Harold had surrendered</a:t>
             </a:r>
             <a:endParaRPr lang="en-US" sz="2400" dirty="0"/>
           </a:p>
@@ -10770,7 +10770,7 @@
                 <a:ea typeface="Cambria" pitchFamily="34" charset="-122"/>
                 <a:cs typeface="Cambria" pitchFamily="34" charset="-120"/>
               </a:rPr>
-              <a:t>A   His men could rest and build a camp while Harold's men had to march the length of England and arrive tired</a:t>
+              <a:t>B   His men could rest and build a camp while Harold's men had to march the length of England and arrive tired</a:t>
             </a:r>
             <a:endParaRPr lang="en-US" sz="1800" dirty="0"/>
           </a:p>
@@ -11341,7 +11341,7 @@
                 <a:ea typeface="Calibri" pitchFamily="34" charset="-122"/>
                 <a:cs typeface="Calibri" pitchFamily="34" charset="-120"/>
               </a:rPr>
-              <a:t>Harold had surrendered</a:t>
+              <a:t>The English nobles supported William</a:t>
             </a:r>
             <a:endParaRPr lang="en-US" sz="2200" dirty="0"/>
           </a:p>
@@ -11378,7 +11378,7 @@
                 <a:ea typeface="Calibri" pitchFamily="34" charset="-122"/>
                 <a:cs typeface="Calibri" pitchFamily="34" charset="-120"/>
               </a:rPr>
-              <a:t>The English nobles supported William</a:t>
+              <a:t>The south coast had no beaches to defend</a:t>
             </a:r>
             <a:endParaRPr lang="en-US" sz="2200" dirty="0"/>
           </a:p>
@@ -11415,7 +11415,7 @@
                 <a:ea typeface="Calibri" pitchFamily="34" charset="-122"/>
                 <a:cs typeface="Calibri" pitchFamily="34" charset="-120"/>
               </a:rPr>
-              <a:t>The south coast had no beaches to defend</a:t>
+              <a:t>Harold had surrendered</a:t>
             </a:r>
             <a:endParaRPr lang="en-US" sz="2200" dirty="0"/>
           </a:p>

--- a/decks/hist-hastings/hist-hastings_ch4_two-armies.pptx
+++ b/decks/hist-hastings/hist-hastings_ch4_two-armies.pptx
@@ -126,29 +126,29 @@
   <p:extLst>
     <p:ext uri="{521415D9-36F7-43E2-AB2F-B90AF26B5E84}">
       <p14:sectionLst xmlns:p14="http://schemas.microsoft.com/office/powerpoint/2010/main">
-        <p14:section name="Opening" id="{ac7e4172-6f97-3c80-b421-9e2efa923980}">
+        <p14:section name="Opening" id="{cc1672bc-c5dc-f129-2ca2-50214ac1879c}">
           <p14:sldIdLst>
             <p14:sldId id="256"/>
           </p14:sldIdLst>
         </p14:section>
-        <p14:section name="Gate" id="{173d12c9-e3bc-c2dc-e452-e5dd5a97485b}">
+        <p14:section name="Gate" id="{f7f8645c-f1b6-3e99-c2ed-73a5304740b3}">
           <p14:sldIdLst>
             <p14:sldId id="257"/>
             <p14:sldId id="258"/>
           </p14:sldIdLst>
         </p14:section>
-        <p14:section name="Pre-teach" id="{dafb92b6-9b9c-9ea9-2af6-794278f367db}">
+        <p14:section name="Pre-teach" id="{a4128961-8fc6-c25e-f771-9cd5e7655d05}">
           <p14:sldIdLst>
             <p14:sldId id="259"/>
           </p14:sldIdLst>
         </p14:section>
-        <p14:section name="Read-along" id="{bb97d282-5787-d6b1-a006-43b2fb321a35}">
+        <p14:section name="Read-along" id="{dcfb0ed6-f3c8-4953-5841-2d53269a26d4}">
           <p14:sldIdLst>
             <p14:sldId id="260"/>
             <p14:sldId id="261"/>
           </p14:sldIdLst>
         </p14:section>
-        <p14:section name="Teach" id="{ec54cc2a-9eba-fc5a-1f8f-bf88adaa3576}">
+        <p14:section name="Teach" id="{e26078ef-6987-c89b-a24b-e3f6810a2a82}">
           <p14:sldIdLst>
             <p14:sldId id="262"/>
             <p14:sldId id="263"/>
@@ -156,7 +156,7 @@
             <p14:sldId id="265"/>
           </p14:sldIdLst>
         </p14:section>
-        <p14:section name="Routes" id="{5b7c33d6-2c2e-2d79-3c36-fb5978c34615}">
+        <p14:section name="Routes" id="{683523db-6d3b-0ea0-478f-7e35b8eee7e9}">
           <p14:sldIdLst>
             <p14:sldId id="266"/>
             <p14:sldId id="267"/>
@@ -166,12 +166,12 @@
             <p14:sldId id="271"/>
           </p14:sldIdLst>
         </p14:section>
-        <p14:section name="Close" id="{3ff1bf65-a381-2bf9-750f-78cdb62abfef}">
+        <p14:section name="Close" id="{d26c2a4f-1519-e0b3-4d54-2ebb1f7144a6}">
           <p14:sldIdLst>
             <p14:sldId id="272"/>
           </p14:sldIdLst>
         </p14:section>
-        <p14:section name="Answers" id="{2bfd8282-8dcc-7006-fc25-529d16191ed5}">
+        <p14:section name="Answers" id="{b69bed29-5fb2-9380-c951-ead542c15d93}">
           <p14:sldIdLst>
             <p14:sldId id="273"/>
             <p14:sldId id="274"/>
